--- a/HoI4/SCP_EQ_Tools/SCP_EQ_Tools/_SCP_EQ_Tools_assets/PRC_Flag.pptx
+++ b/HoI4/SCP_EQ_Tools/SCP_EQ_Tools/_SCP_EQ_Tools_assets/PRC_Flag.pptx
@@ -5,11 +5,12 @@
     <p:sldMasterId id="2147483660" r:id="rId1"/>
   </p:sldMasterIdLst>
   <p:notesMasterIdLst>
-    <p:notesMasterId r:id="rId4"/>
+    <p:notesMasterId r:id="rId5"/>
   </p:notesMasterIdLst>
   <p:sldIdLst>
     <p:sldId id="256" r:id="rId2"/>
     <p:sldId id="257" r:id="rId3"/>
+    <p:sldId id="258" r:id="rId4"/>
   </p:sldIdLst>
   <p:sldSz cx="10814050" cy="6858000"/>
   <p:notesSz cx="6858000" cy="9144000"/>
@@ -198,7 +199,7 @@
           <a:p>
             <a:fld id="{AD9DFCFE-27DA-48B2-9B07-B4C20CD6C499}" type="datetimeFigureOut">
               <a:rPr lang="zh-CN" altLang="en-US" smtClean="0"/>
-              <a:t>2026/2/1</a:t>
+              <a:t>2026/4/18</a:t>
             </a:fld>
             <a:endParaRPr lang="zh-CN" altLang="en-US"/>
           </a:p>
@@ -529,11 +530,8 @@
             </a:pPr>
             <a:r>
               <a:rPr lang="en-US" altLang="zh-CN" smtClean="0"/>
-              <a:t>HoI4 national flag size: 82x52, 41x26, 10x7</a:t>
-            </a:r>
-            <a:endParaRPr lang="zh-CN" altLang="en-US" smtClean="0"/>
-          </a:p>
-          <a:p>
+              <a:t>https://zhuanlan.zhihu.com/p/588894093?utm_psn=1828649422269059072</a:t>
+            </a:r>
             <a:endParaRPr lang="zh-CN" altLang="en-US"/>
           </a:p>
         </p:txBody>
@@ -682,6 +680,114 @@
 </p:notes>
 </file>
 
+<file path=ppt/notesSlides/notesSlide3.xml><?xml version="1.0" encoding="utf-8"?>
+<p:notes xmlns:a="http://schemas.openxmlformats.org/drawingml/2006/main" xmlns:r="http://schemas.openxmlformats.org/officeDocument/2006/relationships" xmlns:p="http://schemas.openxmlformats.org/presentationml/2006/main">
+  <p:cSld>
+    <p:spTree>
+      <p:nvGrpSpPr>
+        <p:cNvPr id="1" name=""/>
+        <p:cNvGrpSpPr/>
+        <p:nvPr/>
+      </p:nvGrpSpPr>
+      <p:grpSpPr>
+        <a:xfrm>
+          <a:off x="0" y="0"/>
+          <a:ext cx="0" cy="0"/>
+          <a:chOff x="0" y="0"/>
+          <a:chExt cx="0" cy="0"/>
+        </a:xfrm>
+      </p:grpSpPr>
+      <p:sp>
+        <p:nvSpPr>
+          <p:cNvPr id="2" name="投影片圖像版面配置區 1"/>
+          <p:cNvSpPr>
+            <a:spLocks noGrp="1" noRot="1" noChangeAspect="1"/>
+          </p:cNvSpPr>
+          <p:nvPr>
+            <p:ph type="sldImg"/>
+          </p:nvPr>
+        </p:nvSpPr>
+        <p:spPr/>
+      </p:sp>
+      <p:sp>
+        <p:nvSpPr>
+          <p:cNvPr id="3" name="備忘稿版面配置區 2"/>
+          <p:cNvSpPr>
+            <a:spLocks noGrp="1"/>
+          </p:cNvSpPr>
+          <p:nvPr>
+            <p:ph type="body" idx="1"/>
+          </p:nvPr>
+        </p:nvSpPr>
+        <p:spPr/>
+        <p:txBody>
+          <a:bodyPr/>
+          <a:lstStyle/>
+          <a:p>
+            <a:pPr marL="0" marR="0" lvl="0" indent="0" algn="l" defTabSz="914400" rtl="0" eaLnBrk="1" fontAlgn="auto" latinLnBrk="0" hangingPunct="1">
+              <a:lnSpc>
+                <a:spcPct val="100000"/>
+              </a:lnSpc>
+              <a:spcBef>
+                <a:spcPts val="0"/>
+              </a:spcBef>
+              <a:spcAft>
+                <a:spcPts val="0"/>
+              </a:spcAft>
+              <a:buClrTx/>
+              <a:buSzTx/>
+              <a:buFontTx/>
+              <a:buNone/>
+              <a:tabLst/>
+              <a:defRPr/>
+            </a:pPr>
+            <a:r>
+              <a:rPr lang="en-US" altLang="zh-CN" smtClean="0"/>
+              <a:t>HoI4 national flag size: 82x52, 41x26, 10x7</a:t>
+            </a:r>
+            <a:endParaRPr lang="zh-CN" altLang="en-US" smtClean="0"/>
+          </a:p>
+          <a:p>
+            <a:endParaRPr lang="zh-CN" altLang="en-US"/>
+          </a:p>
+        </p:txBody>
+      </p:sp>
+      <p:sp>
+        <p:nvSpPr>
+          <p:cNvPr id="4" name="投影片編號版面配置區 3"/>
+          <p:cNvSpPr>
+            <a:spLocks noGrp="1"/>
+          </p:cNvSpPr>
+          <p:nvPr>
+            <p:ph type="sldNum" sz="quarter" idx="10"/>
+          </p:nvPr>
+        </p:nvSpPr>
+        <p:spPr/>
+        <p:txBody>
+          <a:bodyPr/>
+          <a:lstStyle/>
+          <a:p>
+            <a:fld id="{C41E944E-3654-452D-9BBA-0D643D0DFAC8}" type="slidenum">
+              <a:rPr lang="zh-CN" altLang="en-US" smtClean="0"/>
+              <a:t>3</a:t>
+            </a:fld>
+            <a:endParaRPr lang="zh-CN" altLang="en-US"/>
+          </a:p>
+        </p:txBody>
+      </p:sp>
+    </p:spTree>
+    <p:extLst>
+      <p:ext uri="{BB962C8B-B14F-4D97-AF65-F5344CB8AC3E}">
+        <p14:creationId xmlns:p14="http://schemas.microsoft.com/office/powerpoint/2010/main" val="3750652842"/>
+      </p:ext>
+    </p:extLst>
+  </p:cSld>
+  <p:clrMapOvr>
+    <a:masterClrMapping/>
+  </p:clrMapOvr>
+</p:notes>
+</file>
+
 <file path=ppt/slideLayouts/slideLayout1.xml><?xml version="1.0" encoding="utf-8"?>
 <p:sldLayout xmlns:a="http://schemas.openxmlformats.org/drawingml/2006/main" xmlns:r="http://schemas.openxmlformats.org/officeDocument/2006/relationships" xmlns:p="http://schemas.openxmlformats.org/presentationml/2006/main" type="title" preserve="1">
   <p:cSld name="標題投影片">
@@ -813,7 +919,7 @@
           <a:p>
             <a:fld id="{ED2EBBB6-B2F7-45FE-8FEE-172CAE584435}" type="datetimeFigureOut">
               <a:rPr lang="zh-CN" altLang="en-US" smtClean="0"/>
-              <a:t>2026/2/1</a:t>
+              <a:t>2026/4/18</a:t>
             </a:fld>
             <a:endParaRPr lang="zh-CN" altLang="en-US"/>
           </a:p>
@@ -983,7 +1089,7 @@
           <a:p>
             <a:fld id="{ED2EBBB6-B2F7-45FE-8FEE-172CAE584435}" type="datetimeFigureOut">
               <a:rPr lang="zh-CN" altLang="en-US" smtClean="0"/>
-              <a:t>2026/2/1</a:t>
+              <a:t>2026/4/18</a:t>
             </a:fld>
             <a:endParaRPr lang="zh-CN" altLang="en-US"/>
           </a:p>
@@ -1163,7 +1269,7 @@
           <a:p>
             <a:fld id="{ED2EBBB6-B2F7-45FE-8FEE-172CAE584435}" type="datetimeFigureOut">
               <a:rPr lang="zh-CN" altLang="en-US" smtClean="0"/>
-              <a:t>2026/2/1</a:t>
+              <a:t>2026/4/18</a:t>
             </a:fld>
             <a:endParaRPr lang="zh-CN" altLang="en-US"/>
           </a:p>
@@ -1333,7 +1439,7 @@
           <a:p>
             <a:fld id="{ED2EBBB6-B2F7-45FE-8FEE-172CAE584435}" type="datetimeFigureOut">
               <a:rPr lang="zh-CN" altLang="en-US" smtClean="0"/>
-              <a:t>2026/2/1</a:t>
+              <a:t>2026/4/18</a:t>
             </a:fld>
             <a:endParaRPr lang="zh-CN" altLang="en-US"/>
           </a:p>
@@ -1579,7 +1685,7 @@
           <a:p>
             <a:fld id="{ED2EBBB6-B2F7-45FE-8FEE-172CAE584435}" type="datetimeFigureOut">
               <a:rPr lang="zh-CN" altLang="en-US" smtClean="0"/>
-              <a:t>2026/2/1</a:t>
+              <a:t>2026/4/18</a:t>
             </a:fld>
             <a:endParaRPr lang="zh-CN" altLang="en-US"/>
           </a:p>
@@ -1811,7 +1917,7 @@
           <a:p>
             <a:fld id="{ED2EBBB6-B2F7-45FE-8FEE-172CAE584435}" type="datetimeFigureOut">
               <a:rPr lang="zh-CN" altLang="en-US" smtClean="0"/>
-              <a:t>2026/2/1</a:t>
+              <a:t>2026/4/18</a:t>
             </a:fld>
             <a:endParaRPr lang="zh-CN" altLang="en-US"/>
           </a:p>
@@ -2178,7 +2284,7 @@
           <a:p>
             <a:fld id="{ED2EBBB6-B2F7-45FE-8FEE-172CAE584435}" type="datetimeFigureOut">
               <a:rPr lang="zh-CN" altLang="en-US" smtClean="0"/>
-              <a:t>2026/2/1</a:t>
+              <a:t>2026/4/18</a:t>
             </a:fld>
             <a:endParaRPr lang="zh-CN" altLang="en-US"/>
           </a:p>
@@ -2296,7 +2402,7 @@
           <a:p>
             <a:fld id="{ED2EBBB6-B2F7-45FE-8FEE-172CAE584435}" type="datetimeFigureOut">
               <a:rPr lang="zh-CN" altLang="en-US" smtClean="0"/>
-              <a:t>2026/2/1</a:t>
+              <a:t>2026/4/18</a:t>
             </a:fld>
             <a:endParaRPr lang="zh-CN" altLang="en-US"/>
           </a:p>
@@ -2391,7 +2497,7 @@
           <a:p>
             <a:fld id="{ED2EBBB6-B2F7-45FE-8FEE-172CAE584435}" type="datetimeFigureOut">
               <a:rPr lang="zh-CN" altLang="en-US" smtClean="0"/>
-              <a:t>2026/2/1</a:t>
+              <a:t>2026/4/18</a:t>
             </a:fld>
             <a:endParaRPr lang="zh-CN" altLang="en-US"/>
           </a:p>
@@ -2668,7 +2774,7 @@
           <a:p>
             <a:fld id="{ED2EBBB6-B2F7-45FE-8FEE-172CAE584435}" type="datetimeFigureOut">
               <a:rPr lang="zh-CN" altLang="en-US" smtClean="0"/>
-              <a:t>2026/2/1</a:t>
+              <a:t>2026/4/18</a:t>
             </a:fld>
             <a:endParaRPr lang="zh-CN" altLang="en-US"/>
           </a:p>
@@ -2925,7 +3031,7 @@
           <a:p>
             <a:fld id="{ED2EBBB6-B2F7-45FE-8FEE-172CAE584435}" type="datetimeFigureOut">
               <a:rPr lang="zh-CN" altLang="en-US" smtClean="0"/>
-              <a:t>2026/2/1</a:t>
+              <a:t>2026/4/18</a:t>
             </a:fld>
             <a:endParaRPr lang="zh-CN" altLang="en-US"/>
           </a:p>
@@ -3138,7 +3244,7 @@
           <a:p>
             <a:fld id="{ED2EBBB6-B2F7-45FE-8FEE-172CAE584435}" type="datetimeFigureOut">
               <a:rPr lang="zh-CN" altLang="en-US" smtClean="0"/>
-              <a:t>2026/2/1</a:t>
+              <a:t>2026/4/18</a:t>
             </a:fld>
             <a:endParaRPr lang="zh-CN" altLang="en-US"/>
           </a:p>
@@ -3591,13 +3697,13 @@
       </p:sp>
       <p:pic>
         <p:nvPicPr>
-          <p:cNvPr id="2" name="圖片 1"/>
+          <p:cNvPr id="4" name="圖片 3"/>
           <p:cNvPicPr>
             <a:picLocks noChangeAspect="1"/>
           </p:cNvPicPr>
           <p:nvPr/>
         </p:nvPicPr>
-        <p:blipFill>
+        <p:blipFill rotWithShape="1">
           <a:blip r:embed="rId3">
             <a:extLst>
               <a:ext uri="{28A0092B-C50C-407E-A947-70E740481C1C}">
@@ -3605,14 +3711,13 @@
               </a:ext>
             </a:extLst>
           </a:blip>
-          <a:stretch>
-            <a:fillRect/>
-          </a:stretch>
+          <a:srcRect t="16546" b="19679"/>
+          <a:stretch/>
         </p:blipFill>
         <p:spPr>
           <a:xfrm>
-            <a:off x="-2888" y="-466137"/>
-            <a:ext cx="10819826" cy="7790275"/>
+            <a:off x="-923" y="944697"/>
+            <a:ext cx="10815894" cy="4968607"/>
           </a:xfrm>
           <a:prstGeom prst="rect">
             <a:avLst/>
@@ -3729,6 +3834,112 @@
     <p:extLst>
       <p:ext uri="{BB962C8B-B14F-4D97-AF65-F5344CB8AC3E}">
         <p14:creationId xmlns:p14="http://schemas.microsoft.com/office/powerpoint/2010/main" val="444268554"/>
+      </p:ext>
+    </p:extLst>
+  </p:cSld>
+  <p:clrMapOvr>
+    <a:masterClrMapping/>
+  </p:clrMapOvr>
+</p:sld>
+</file>
+
+<file path=ppt/slides/slide3.xml><?xml version="1.0" encoding="utf-8"?>
+<p:sld xmlns:a="http://schemas.openxmlformats.org/drawingml/2006/main" xmlns:r="http://schemas.openxmlformats.org/officeDocument/2006/relationships" xmlns:p="http://schemas.openxmlformats.org/presentationml/2006/main">
+  <p:cSld>
+    <p:spTree>
+      <p:nvGrpSpPr>
+        <p:cNvPr id="1" name=""/>
+        <p:cNvGrpSpPr/>
+        <p:nvPr/>
+      </p:nvGrpSpPr>
+      <p:grpSpPr>
+        <a:xfrm>
+          <a:off x="0" y="0"/>
+          <a:ext cx="0" cy="0"/>
+          <a:chOff x="0" y="0"/>
+          <a:chExt cx="0" cy="0"/>
+        </a:xfrm>
+      </p:grpSpPr>
+      <p:sp>
+        <p:nvSpPr>
+          <p:cNvPr id="3" name="矩形 2"/>
+          <p:cNvSpPr/>
+          <p:nvPr/>
+        </p:nvSpPr>
+        <p:spPr>
+          <a:xfrm>
+            <a:off x="0" y="0"/>
+            <a:ext cx="10814050" cy="6858000"/>
+          </a:xfrm>
+          <a:prstGeom prst="rect">
+            <a:avLst/>
+          </a:prstGeom>
+          <a:solidFill>
+            <a:srgbClr val="D4000E"/>
+          </a:solidFill>
+          <a:ln>
+            <a:noFill/>
+          </a:ln>
+        </p:spPr>
+        <p:style>
+          <a:lnRef idx="2">
+            <a:schemeClr val="accent1">
+              <a:shade val="50000"/>
+            </a:schemeClr>
+          </a:lnRef>
+          <a:fillRef idx="1">
+            <a:schemeClr val="accent1"/>
+          </a:fillRef>
+          <a:effectRef idx="0">
+            <a:schemeClr val="accent1"/>
+          </a:effectRef>
+          <a:fontRef idx="minor">
+            <a:schemeClr val="lt1"/>
+          </a:fontRef>
+        </p:style>
+        <p:txBody>
+          <a:bodyPr rtlCol="0" anchor="ctr"/>
+          <a:lstStyle/>
+          <a:p>
+            <a:pPr algn="ctr"/>
+            <a:endParaRPr lang="zh-CN" altLang="en-US"/>
+          </a:p>
+        </p:txBody>
+      </p:sp>
+      <p:pic>
+        <p:nvPicPr>
+          <p:cNvPr id="2" name="圖片 1"/>
+          <p:cNvPicPr>
+            <a:picLocks noChangeAspect="1"/>
+          </p:cNvPicPr>
+          <p:nvPr/>
+        </p:nvPicPr>
+        <p:blipFill>
+          <a:blip r:embed="rId3">
+            <a:extLst>
+              <a:ext uri="{28A0092B-C50C-407E-A947-70E740481C1C}">
+                <a14:useLocalDpi xmlns:a14="http://schemas.microsoft.com/office/drawing/2010/main" val="0"/>
+              </a:ext>
+            </a:extLst>
+          </a:blip>
+          <a:stretch>
+            <a:fillRect/>
+          </a:stretch>
+        </p:blipFill>
+        <p:spPr>
+          <a:xfrm>
+            <a:off x="0" y="80"/>
+            <a:ext cx="10814050" cy="6857839"/>
+          </a:xfrm>
+          <a:prstGeom prst="rect">
+            <a:avLst/>
+          </a:prstGeom>
+        </p:spPr>
+      </p:pic>
+    </p:spTree>
+    <p:extLst>
+      <p:ext uri="{BB962C8B-B14F-4D97-AF65-F5344CB8AC3E}">
+        <p14:creationId xmlns:p14="http://schemas.microsoft.com/office/powerpoint/2010/main" val="2191167183"/>
       </p:ext>
     </p:extLst>
   </p:cSld>

--- a/HoI4/SCP_EQ_Tools/SCP_EQ_Tools/_SCP_EQ_Tools_assets/PRC_Flag.pptx
+++ b/HoI4/SCP_EQ_Tools/SCP_EQ_Tools/_SCP_EQ_Tools_assets/PRC_Flag.pptx
@@ -5,12 +5,13 @@
     <p:sldMasterId id="2147483660" r:id="rId1"/>
   </p:sldMasterIdLst>
   <p:notesMasterIdLst>
-    <p:notesMasterId r:id="rId5"/>
+    <p:notesMasterId r:id="rId6"/>
   </p:notesMasterIdLst>
   <p:sldIdLst>
     <p:sldId id="256" r:id="rId2"/>
     <p:sldId id="257" r:id="rId3"/>
     <p:sldId id="258" r:id="rId4"/>
+    <p:sldId id="259" r:id="rId5"/>
   </p:sldIdLst>
   <p:sldSz cx="10814050" cy="6858000"/>
   <p:notesSz cx="6858000" cy="9144000"/>
@@ -3940,6 +3941,66 @@
     <p:extLst>
       <p:ext uri="{BB962C8B-B14F-4D97-AF65-F5344CB8AC3E}">
         <p14:creationId xmlns:p14="http://schemas.microsoft.com/office/powerpoint/2010/main" val="2191167183"/>
+      </p:ext>
+    </p:extLst>
+  </p:cSld>
+  <p:clrMapOvr>
+    <a:masterClrMapping/>
+  </p:clrMapOvr>
+</p:sld>
+</file>
+
+<file path=ppt/slides/slide4.xml><?xml version="1.0" encoding="utf-8"?>
+<p:sld xmlns:a="http://schemas.openxmlformats.org/drawingml/2006/main" xmlns:r="http://schemas.openxmlformats.org/officeDocument/2006/relationships" xmlns:p="http://schemas.openxmlformats.org/presentationml/2006/main">
+  <p:cSld>
+    <p:spTree>
+      <p:nvGrpSpPr>
+        <p:cNvPr id="1" name=""/>
+        <p:cNvGrpSpPr/>
+        <p:nvPr/>
+      </p:nvGrpSpPr>
+      <p:grpSpPr>
+        <a:xfrm>
+          <a:off x="0" y="0"/>
+          <a:ext cx="0" cy="0"/>
+          <a:chOff x="0" y="0"/>
+          <a:chExt cx="0" cy="0"/>
+        </a:xfrm>
+      </p:grpSpPr>
+      <p:pic>
+        <p:nvPicPr>
+          <p:cNvPr id="4" name="圖片 3"/>
+          <p:cNvPicPr>
+            <a:picLocks noChangeAspect="1"/>
+          </p:cNvPicPr>
+          <p:nvPr/>
+        </p:nvPicPr>
+        <p:blipFill>
+          <a:blip r:embed="rId2">
+            <a:extLst>
+              <a:ext uri="{28A0092B-C50C-407E-A947-70E740481C1C}">
+                <a14:useLocalDpi xmlns:a14="http://schemas.microsoft.com/office/drawing/2010/main" val="0"/>
+              </a:ext>
+            </a:extLst>
+          </a:blip>
+          <a:stretch>
+            <a:fillRect/>
+          </a:stretch>
+        </p:blipFill>
+        <p:spPr>
+          <a:xfrm>
+            <a:off x="0" y="80"/>
+            <a:ext cx="10814050" cy="6857839"/>
+          </a:xfrm>
+          <a:prstGeom prst="rect">
+            <a:avLst/>
+          </a:prstGeom>
+        </p:spPr>
+      </p:pic>
+    </p:spTree>
+    <p:extLst>
+      <p:ext uri="{BB962C8B-B14F-4D97-AF65-F5344CB8AC3E}">
+        <p14:creationId xmlns:p14="http://schemas.microsoft.com/office/powerpoint/2010/main" val="3875702102"/>
       </p:ext>
     </p:extLst>
   </p:cSld>
